--- a/Figures and tables final data set.pptx
+++ b/Figures and tables final data set.pptx
@@ -116,6 +116,11 @@
       </a:defRPr>
     </a:lvl9pPr>
   </p:defaultTextStyle>
+  <p:extLst>
+    <p:ext uri="{EFAFB233-063F-42B5-8137-9DF3F51BA10A}">
+      <p15:sldGuideLst xmlns:p15="http://schemas.microsoft.com/office/powerpoint/2012/main"/>
+    </p:ext>
+  </p:extLst>
 </p:presentation>
 </file>
 
@@ -266,7 +271,7 @@
           <a:p>
             <a:fld id="{BE76205E-E917-4F89-9EAE-D9F9DED07A8F}" type="datetimeFigureOut">
               <a:rPr lang="en-US" smtClean="0"/>
-              <a:t>8/12/2026</a:t>
+              <a:t>8/14/2026</a:t>
             </a:fld>
             <a:endParaRPr lang="en-US"/>
           </a:p>
@@ -464,7 +469,7 @@
           <a:p>
             <a:fld id="{BE76205E-E917-4F89-9EAE-D9F9DED07A8F}" type="datetimeFigureOut">
               <a:rPr lang="en-US" smtClean="0"/>
-              <a:t>8/12/2026</a:t>
+              <a:t>8/14/2026</a:t>
             </a:fld>
             <a:endParaRPr lang="en-US"/>
           </a:p>
@@ -672,7 +677,7 @@
           <a:p>
             <a:fld id="{BE76205E-E917-4F89-9EAE-D9F9DED07A8F}" type="datetimeFigureOut">
               <a:rPr lang="en-US" smtClean="0"/>
-              <a:t>8/12/2026</a:t>
+              <a:t>8/14/2026</a:t>
             </a:fld>
             <a:endParaRPr lang="en-US"/>
           </a:p>
@@ -870,7 +875,7 @@
           <a:p>
             <a:fld id="{BE76205E-E917-4F89-9EAE-D9F9DED07A8F}" type="datetimeFigureOut">
               <a:rPr lang="en-US" smtClean="0"/>
-              <a:t>8/12/2026</a:t>
+              <a:t>8/14/2026</a:t>
             </a:fld>
             <a:endParaRPr lang="en-US"/>
           </a:p>
@@ -1145,7 +1150,7 @@
           <a:p>
             <a:fld id="{BE76205E-E917-4F89-9EAE-D9F9DED07A8F}" type="datetimeFigureOut">
               <a:rPr lang="en-US" smtClean="0"/>
-              <a:t>8/12/2026</a:t>
+              <a:t>8/14/2026</a:t>
             </a:fld>
             <a:endParaRPr lang="en-US"/>
           </a:p>
@@ -1410,7 +1415,7 @@
           <a:p>
             <a:fld id="{BE76205E-E917-4F89-9EAE-D9F9DED07A8F}" type="datetimeFigureOut">
               <a:rPr lang="en-US" smtClean="0"/>
-              <a:t>8/12/2026</a:t>
+              <a:t>8/14/2026</a:t>
             </a:fld>
             <a:endParaRPr lang="en-US"/>
           </a:p>
@@ -1822,7 +1827,7 @@
           <a:p>
             <a:fld id="{BE76205E-E917-4F89-9EAE-D9F9DED07A8F}" type="datetimeFigureOut">
               <a:rPr lang="en-US" smtClean="0"/>
-              <a:t>8/12/2026</a:t>
+              <a:t>8/14/2026</a:t>
             </a:fld>
             <a:endParaRPr lang="en-US"/>
           </a:p>
@@ -1963,7 +1968,7 @@
           <a:p>
             <a:fld id="{BE76205E-E917-4F89-9EAE-D9F9DED07A8F}" type="datetimeFigureOut">
               <a:rPr lang="en-US" smtClean="0"/>
-              <a:t>8/12/2026</a:t>
+              <a:t>8/14/2026</a:t>
             </a:fld>
             <a:endParaRPr lang="en-US"/>
           </a:p>
@@ -2076,7 +2081,7 @@
           <a:p>
             <a:fld id="{BE76205E-E917-4F89-9EAE-D9F9DED07A8F}" type="datetimeFigureOut">
               <a:rPr lang="en-US" smtClean="0"/>
-              <a:t>8/12/2026</a:t>
+              <a:t>8/14/2026</a:t>
             </a:fld>
             <a:endParaRPr lang="en-US"/>
           </a:p>
@@ -2387,7 +2392,7 @@
           <a:p>
             <a:fld id="{BE76205E-E917-4F89-9EAE-D9F9DED07A8F}" type="datetimeFigureOut">
               <a:rPr lang="en-US" smtClean="0"/>
-              <a:t>8/12/2026</a:t>
+              <a:t>8/14/2026</a:t>
             </a:fld>
             <a:endParaRPr lang="en-US"/>
           </a:p>
@@ -2675,7 +2680,7 @@
           <a:p>
             <a:fld id="{BE76205E-E917-4F89-9EAE-D9F9DED07A8F}" type="datetimeFigureOut">
               <a:rPr lang="en-US" smtClean="0"/>
-              <a:t>8/12/2026</a:t>
+              <a:t>8/14/2026</a:t>
             </a:fld>
             <a:endParaRPr lang="en-US"/>
           </a:p>
@@ -2916,7 +2921,7 @@
           <a:p>
             <a:fld id="{BE76205E-E917-4F89-9EAE-D9F9DED07A8F}" type="datetimeFigureOut">
               <a:rPr lang="en-US" smtClean="0"/>
-              <a:t>8/12/2026</a:t>
+              <a:t>8/14/2026</a:t>
             </a:fld>
             <a:endParaRPr lang="en-US"/>
           </a:p>
@@ -4877,10 +4882,10 @@
       </p:sp>
       <p:pic>
         <p:nvPicPr>
-          <p:cNvPr id="7" name="Picture 6">
-            <a:extLst>
-              <a:ext uri="{FF2B5EF4-FFF2-40B4-BE49-F238E27FC236}">
-                <a16:creationId xmlns:a16="http://schemas.microsoft.com/office/drawing/2014/main" id="{C25FD911-CE2D-9919-7FCE-33C8CFEDE292}"/>
+          <p:cNvPr id="4" name="Picture 3">
+            <a:extLst>
+              <a:ext uri="{FF2B5EF4-FFF2-40B4-BE49-F238E27FC236}">
+                <a16:creationId xmlns:a16="http://schemas.microsoft.com/office/drawing/2014/main" id="{505DB7AE-32B4-0DD1-7939-4F0FDCAD4E24}"/>
               </a:ext>
             </a:extLst>
           </p:cNvPr>
@@ -6197,10 +6202,10 @@
       </p:sp>
       <p:pic>
         <p:nvPicPr>
-          <p:cNvPr id="9" name="Picture 8">
-            <a:extLst>
-              <a:ext uri="{FF2B5EF4-FFF2-40B4-BE49-F238E27FC236}">
-                <a16:creationId xmlns:a16="http://schemas.microsoft.com/office/drawing/2014/main" id="{DC299D87-D8C2-9D79-8269-EF6096FA21C5}"/>
+          <p:cNvPr id="4" name="Picture 3">
+            <a:extLst>
+              <a:ext uri="{FF2B5EF4-FFF2-40B4-BE49-F238E27FC236}">
+                <a16:creationId xmlns:a16="http://schemas.microsoft.com/office/drawing/2014/main" id="{A20AA7C5-2BE5-EC28-81CC-CC4F01F5B5EC}"/>
               </a:ext>
             </a:extLst>
           </p:cNvPr>

--- a/Figures and tables final data set.pptx
+++ b/Figures and tables final data set.pptx
@@ -15,9 +15,10 @@
     <p:sldId id="285" r:id="rId9"/>
     <p:sldId id="262" r:id="rId10"/>
     <p:sldId id="264" r:id="rId11"/>
-    <p:sldId id="260" r:id="rId12"/>
-    <p:sldId id="265" r:id="rId13"/>
-    <p:sldId id="286" r:id="rId14"/>
+    <p:sldId id="287" r:id="rId12"/>
+    <p:sldId id="288" r:id="rId13"/>
+    <p:sldId id="260" r:id="rId14"/>
+    <p:sldId id="286" r:id="rId15"/>
   </p:sldIdLst>
   <p:sldSz cx="12192000" cy="6858000"/>
   <p:notesSz cx="6858000" cy="9144000"/>
@@ -3439,41 +3440,58 @@
         </p:nvSpPr>
         <p:spPr/>
         <p:txBody>
-          <a:bodyPr/>
+          <a:bodyPr>
+            <a:normAutofit/>
+          </a:bodyPr>
           <a:lstStyle/>
           <a:p>
             <a:r>
-              <a:rPr lang="en-US" dirty="0"/>
-              <a:t>Fig. 6. Effect plots for each taxon from vertical position model</a:t>
-            </a:r>
-          </a:p>
-        </p:txBody>
-      </p:sp>
-      <p:sp>
-        <p:nvSpPr>
-          <p:cNvPr id="3" name="Content Placeholder 2">
-            <a:extLst>
-              <a:ext uri="{FF2B5EF4-FFF2-40B4-BE49-F238E27FC236}">
-                <a16:creationId xmlns:a16="http://schemas.microsoft.com/office/drawing/2014/main" id="{8F6F819C-97CA-18C4-FD21-F38A9C7319C1}"/>
-              </a:ext>
-            </a:extLst>
-          </p:cNvPr>
-          <p:cNvSpPr>
-            <a:spLocks noGrp="1"/>
-          </p:cNvSpPr>
-          <p:nvPr>
-            <p:ph idx="1"/>
-          </p:nvPr>
-        </p:nvSpPr>
-        <p:spPr/>
-        <p:txBody>
-          <a:bodyPr/>
-          <a:lstStyle/>
-          <a:p>
-            <a:endParaRPr lang="en-US"/>
-          </a:p>
-        </p:txBody>
-      </p:sp>
+              <a:rPr lang="en-US" sz="1800" b="1" dirty="0"/>
+              <a:t>Fig. 6a. </a:t>
+            </a:r>
+            <a:r>
+              <a:rPr lang="en-US" sz="1800" dirty="0"/>
+              <a:t>Surfaces showing log-transformed abundance of each taxon at combinations of depth and time of day predicted from GLMM.</a:t>
+            </a:r>
+          </a:p>
+        </p:txBody>
+      </p:sp>
+      <p:pic>
+        <p:nvPicPr>
+          <p:cNvPr id="5" name="Picture 4">
+            <a:extLst>
+              <a:ext uri="{FF2B5EF4-FFF2-40B4-BE49-F238E27FC236}">
+                <a16:creationId xmlns:a16="http://schemas.microsoft.com/office/drawing/2014/main" id="{C1735C20-EE71-237D-B33E-31977871BB9C}"/>
+              </a:ext>
+            </a:extLst>
+          </p:cNvPr>
+          <p:cNvPicPr>
+            <a:picLocks noChangeAspect="1"/>
+          </p:cNvPicPr>
+          <p:nvPr/>
+        </p:nvPicPr>
+        <p:blipFill>
+          <a:blip r:embed="rId2">
+            <a:extLst>
+              <a:ext uri="{28A0092B-C50C-407E-A947-70E740481C1C}">
+                <a14:useLocalDpi xmlns:a14="http://schemas.microsoft.com/office/drawing/2010/main" val="0"/>
+              </a:ext>
+            </a:extLst>
+          </a:blip>
+          <a:stretch>
+            <a:fillRect/>
+          </a:stretch>
+        </p:blipFill>
+        <p:spPr>
+          <a:xfrm>
+            <a:off x="2220516" y="1690688"/>
+            <a:ext cx="7750968" cy="5167312"/>
+          </a:xfrm>
+          <a:prstGeom prst="rect">
+            <a:avLst/>
+          </a:prstGeom>
+        </p:spPr>
+      </p:pic>
     </p:spTree>
     <p:extLst>
       <p:ext uri="{BB962C8B-B14F-4D97-AF65-F5344CB8AC3E}">
@@ -3509,6 +3527,206 @@
           <p:cNvPr id="2" name="Title 1">
             <a:extLst>
               <a:ext uri="{FF2B5EF4-FFF2-40B4-BE49-F238E27FC236}">
+                <a16:creationId xmlns:a16="http://schemas.microsoft.com/office/drawing/2014/main" id="{66C97513-B622-C2A5-663B-5AF96D9D72E4}"/>
+              </a:ext>
+            </a:extLst>
+          </p:cNvPr>
+          <p:cNvSpPr>
+            <a:spLocks noGrp="1"/>
+          </p:cNvSpPr>
+          <p:nvPr>
+            <p:ph type="title"/>
+          </p:nvPr>
+        </p:nvSpPr>
+        <p:spPr/>
+        <p:txBody>
+          <a:bodyPr>
+            <a:normAutofit/>
+          </a:bodyPr>
+          <a:lstStyle/>
+          <a:p>
+            <a:r>
+              <a:rPr lang="en-US" sz="1800" b="1" dirty="0"/>
+              <a:t>Fig. 6b. </a:t>
+            </a:r>
+            <a:r>
+              <a:rPr lang="en-US" sz="1800" dirty="0"/>
+              <a:t>Taxon-specific relationships between the slope of the effect of depth on abundance and time of day predicted from GLMM.</a:t>
+            </a:r>
+          </a:p>
+        </p:txBody>
+      </p:sp>
+      <p:pic>
+        <p:nvPicPr>
+          <p:cNvPr id="5" name="Picture 4">
+            <a:extLst>
+              <a:ext uri="{FF2B5EF4-FFF2-40B4-BE49-F238E27FC236}">
+                <a16:creationId xmlns:a16="http://schemas.microsoft.com/office/drawing/2014/main" id="{94CCDB45-C503-1684-2D63-63B47370EDE3}"/>
+              </a:ext>
+            </a:extLst>
+          </p:cNvPr>
+          <p:cNvPicPr>
+            <a:picLocks noChangeAspect="1"/>
+          </p:cNvPicPr>
+          <p:nvPr/>
+        </p:nvPicPr>
+        <p:blipFill>
+          <a:blip r:embed="rId2">
+            <a:extLst>
+              <a:ext uri="{28A0092B-C50C-407E-A947-70E740481C1C}">
+                <a14:useLocalDpi xmlns:a14="http://schemas.microsoft.com/office/drawing/2010/main" val="0"/>
+              </a:ext>
+            </a:extLst>
+          </a:blip>
+          <a:stretch>
+            <a:fillRect/>
+          </a:stretch>
+        </p:blipFill>
+        <p:spPr>
+          <a:xfrm>
+            <a:off x="2227932" y="1700576"/>
+            <a:ext cx="7736135" cy="5157424"/>
+          </a:xfrm>
+          <a:prstGeom prst="rect">
+            <a:avLst/>
+          </a:prstGeom>
+        </p:spPr>
+      </p:pic>
+    </p:spTree>
+    <p:extLst>
+      <p:ext uri="{BB962C8B-B14F-4D97-AF65-F5344CB8AC3E}">
+        <p14:creationId xmlns:p14="http://schemas.microsoft.com/office/powerpoint/2010/main" val="1092495578"/>
+      </p:ext>
+    </p:extLst>
+  </p:cSld>
+  <p:clrMapOvr>
+    <a:masterClrMapping/>
+  </p:clrMapOvr>
+</p:sld>
+</file>
+
+<file path=ppt/slides/slide12.xml><?xml version="1.0" encoding="utf-8"?>
+<p:sld xmlns:a="http://schemas.openxmlformats.org/drawingml/2006/main" xmlns:r="http://schemas.openxmlformats.org/officeDocument/2006/relationships" xmlns:p="http://schemas.openxmlformats.org/presentationml/2006/main">
+  <p:cSld>
+    <p:spTree>
+      <p:nvGrpSpPr>
+        <p:cNvPr id="1" name=""/>
+        <p:cNvGrpSpPr/>
+        <p:nvPr/>
+      </p:nvGrpSpPr>
+      <p:grpSpPr>
+        <a:xfrm>
+          <a:off x="0" y="0"/>
+          <a:ext cx="0" cy="0"/>
+          <a:chOff x="0" y="0"/>
+          <a:chExt cx="0" cy="0"/>
+        </a:xfrm>
+      </p:grpSpPr>
+      <p:sp>
+        <p:nvSpPr>
+          <p:cNvPr id="2" name="Title 1">
+            <a:extLst>
+              <a:ext uri="{FF2B5EF4-FFF2-40B4-BE49-F238E27FC236}">
+                <a16:creationId xmlns:a16="http://schemas.microsoft.com/office/drawing/2014/main" id="{0E5CD816-BFA4-B315-4067-FF3448619119}"/>
+              </a:ext>
+            </a:extLst>
+          </p:cNvPr>
+          <p:cNvSpPr>
+            <a:spLocks noGrp="1"/>
+          </p:cNvSpPr>
+          <p:nvPr>
+            <p:ph type="title"/>
+          </p:nvPr>
+        </p:nvSpPr>
+        <p:spPr/>
+        <p:txBody>
+          <a:bodyPr>
+            <a:normAutofit/>
+          </a:bodyPr>
+          <a:lstStyle/>
+          <a:p>
+            <a:r>
+              <a:rPr lang="en-US" sz="1800" b="1" dirty="0"/>
+              <a:t>Fig. 6c. </a:t>
+            </a:r>
+            <a:r>
+              <a:rPr lang="en-US" sz="1800" dirty="0"/>
+              <a:t>Total predicted count in the top 100 m of the water column of each taxon predicted by GLMM vs. time of day.</a:t>
+            </a:r>
+          </a:p>
+        </p:txBody>
+      </p:sp>
+      <p:pic>
+        <p:nvPicPr>
+          <p:cNvPr id="5" name="Picture 4">
+            <a:extLst>
+              <a:ext uri="{FF2B5EF4-FFF2-40B4-BE49-F238E27FC236}">
+                <a16:creationId xmlns:a16="http://schemas.microsoft.com/office/drawing/2014/main" id="{E06CEE14-A71B-7E59-525F-A0453DFB9BD9}"/>
+              </a:ext>
+            </a:extLst>
+          </p:cNvPr>
+          <p:cNvPicPr>
+            <a:picLocks noChangeAspect="1"/>
+          </p:cNvPicPr>
+          <p:nvPr/>
+        </p:nvPicPr>
+        <p:blipFill>
+          <a:blip r:embed="rId2">
+            <a:extLst>
+              <a:ext uri="{28A0092B-C50C-407E-A947-70E740481C1C}">
+                <a14:useLocalDpi xmlns:a14="http://schemas.microsoft.com/office/drawing/2010/main" val="0"/>
+              </a:ext>
+            </a:extLst>
+          </a:blip>
+          <a:stretch>
+            <a:fillRect/>
+          </a:stretch>
+        </p:blipFill>
+        <p:spPr>
+          <a:xfrm>
+            <a:off x="2220516" y="1690689"/>
+            <a:ext cx="7750967" cy="5167311"/>
+          </a:xfrm>
+          <a:prstGeom prst="rect">
+            <a:avLst/>
+          </a:prstGeom>
+        </p:spPr>
+      </p:pic>
+    </p:spTree>
+    <p:extLst>
+      <p:ext uri="{BB962C8B-B14F-4D97-AF65-F5344CB8AC3E}">
+        <p14:creationId xmlns:p14="http://schemas.microsoft.com/office/powerpoint/2010/main" val="3018148246"/>
+      </p:ext>
+    </p:extLst>
+  </p:cSld>
+  <p:clrMapOvr>
+    <a:masterClrMapping/>
+  </p:clrMapOvr>
+</p:sld>
+</file>
+
+<file path=ppt/slides/slide13.xml><?xml version="1.0" encoding="utf-8"?>
+<p:sld xmlns:a="http://schemas.openxmlformats.org/drawingml/2006/main" xmlns:r="http://schemas.openxmlformats.org/officeDocument/2006/relationships" xmlns:p="http://schemas.openxmlformats.org/presentationml/2006/main">
+  <p:cSld>
+    <p:spTree>
+      <p:nvGrpSpPr>
+        <p:cNvPr id="1" name=""/>
+        <p:cNvGrpSpPr/>
+        <p:nvPr/>
+      </p:nvGrpSpPr>
+      <p:grpSpPr>
+        <a:xfrm>
+          <a:off x="0" y="0"/>
+          <a:ext cx="0" cy="0"/>
+          <a:chOff x="0" y="0"/>
+          <a:chExt cx="0" cy="0"/>
+        </a:xfrm>
+      </p:grpSpPr>
+      <p:sp>
+        <p:nvSpPr>
+          <p:cNvPr id="2" name="Title 1">
+            <a:extLst>
+              <a:ext uri="{FF2B5EF4-FFF2-40B4-BE49-F238E27FC236}">
                 <a16:creationId xmlns:a16="http://schemas.microsoft.com/office/drawing/2014/main" id="{60BE62EC-21AD-8D3E-7604-956FE891D1E8}"/>
               </a:ext>
             </a:extLst>
@@ -3581,7 +3799,7 @@
 </p:sld>
 </file>
 
-<file path=ppt/slides/slide12.xml><?xml version="1.0" encoding="utf-8"?>
+<file path=ppt/slides/slide14.xml><?xml version="1.0" encoding="utf-8"?>
 <p:sld xmlns:a="http://schemas.openxmlformats.org/drawingml/2006/main" xmlns:r="http://schemas.openxmlformats.org/officeDocument/2006/relationships" xmlns:p="http://schemas.openxmlformats.org/presentationml/2006/main">
   <p:cSld>
     <p:spTree>
@@ -3603,7 +3821,7 @@
           <p:cNvPr id="2" name="Title 1">
             <a:extLst>
               <a:ext uri="{FF2B5EF4-FFF2-40B4-BE49-F238E27FC236}">
-                <a16:creationId xmlns:a16="http://schemas.microsoft.com/office/drawing/2014/main" id="{134360E0-E560-A35B-8217-840673FD100C}"/>
+                <a16:creationId xmlns:a16="http://schemas.microsoft.com/office/drawing/2014/main" id="{7C7546C2-CE27-C327-E7F6-2084BFC32FFE}"/>
               </a:ext>
             </a:extLst>
           </p:cNvPr>
@@ -3621,7 +3839,7 @@
           <a:p>
             <a:r>
               <a:rPr lang="en-US" dirty="0"/>
-              <a:t>Fig. S2. Scatterplot of vertical position by taxon</a:t>
+              <a:t>Table S1. Model parameters from vertical position GLMM</a:t>
             </a:r>
           </a:p>
         </p:txBody>
@@ -3631,7 +3849,7 @@
           <p:cNvPr id="3" name="Content Placeholder 2">
             <a:extLst>
               <a:ext uri="{FF2B5EF4-FFF2-40B4-BE49-F238E27FC236}">
-                <a16:creationId xmlns:a16="http://schemas.microsoft.com/office/drawing/2014/main" id="{A3C538C8-9529-D672-5482-9F5B3306E683}"/>
+                <a16:creationId xmlns:a16="http://schemas.microsoft.com/office/drawing/2014/main" id="{96CEE610-A8BD-AD7D-7BDC-61AEBDB24A66}"/>
               </a:ext>
             </a:extLst>
           </p:cNvPr>
@@ -3654,90 +3872,7 @@
     </p:spTree>
     <p:extLst>
       <p:ext uri="{BB962C8B-B14F-4D97-AF65-F5344CB8AC3E}">
-        <p14:creationId xmlns:p14="http://schemas.microsoft.com/office/powerpoint/2010/main" val="3240870100"/>
-      </p:ext>
-    </p:extLst>
-  </p:cSld>
-  <p:clrMapOvr>
-    <a:masterClrMapping/>
-  </p:clrMapOvr>
-</p:sld>
-</file>
-
-<file path=ppt/slides/slide13.xml><?xml version="1.0" encoding="utf-8"?>
-<p:sld xmlns:a="http://schemas.openxmlformats.org/drawingml/2006/main" xmlns:r="http://schemas.openxmlformats.org/officeDocument/2006/relationships" xmlns:p="http://schemas.openxmlformats.org/presentationml/2006/main">
-  <p:cSld>
-    <p:spTree>
-      <p:nvGrpSpPr>
-        <p:cNvPr id="1" name=""/>
-        <p:cNvGrpSpPr/>
-        <p:nvPr/>
-      </p:nvGrpSpPr>
-      <p:grpSpPr>
-        <a:xfrm>
-          <a:off x="0" y="0"/>
-          <a:ext cx="0" cy="0"/>
-          <a:chOff x="0" y="0"/>
-          <a:chExt cx="0" cy="0"/>
-        </a:xfrm>
-      </p:grpSpPr>
-      <p:sp>
-        <p:nvSpPr>
-          <p:cNvPr id="2" name="Title 1">
-            <a:extLst>
-              <a:ext uri="{FF2B5EF4-FFF2-40B4-BE49-F238E27FC236}">
-                <a16:creationId xmlns:a16="http://schemas.microsoft.com/office/drawing/2014/main" id="{FAA5EF60-05CD-4063-EA5E-3D2BEED307E2}"/>
-              </a:ext>
-            </a:extLst>
-          </p:cNvPr>
-          <p:cNvSpPr>
-            <a:spLocks noGrp="1"/>
-          </p:cNvSpPr>
-          <p:nvPr>
-            <p:ph type="title"/>
-          </p:nvPr>
-        </p:nvSpPr>
-        <p:spPr/>
-        <p:txBody>
-          <a:bodyPr/>
-          <a:lstStyle/>
-          <a:p>
-            <a:r>
-              <a:rPr lang="en-US" dirty="0"/>
-              <a:t>Table S1. Single-taxon model results</a:t>
-            </a:r>
-          </a:p>
-        </p:txBody>
-      </p:sp>
-      <p:sp>
-        <p:nvSpPr>
-          <p:cNvPr id="3" name="Content Placeholder 2">
-            <a:extLst>
-              <a:ext uri="{FF2B5EF4-FFF2-40B4-BE49-F238E27FC236}">
-                <a16:creationId xmlns:a16="http://schemas.microsoft.com/office/drawing/2014/main" id="{D1850EFD-E31D-D7A0-03EA-9503892FEB4B}"/>
-              </a:ext>
-            </a:extLst>
-          </p:cNvPr>
-          <p:cNvSpPr>
-            <a:spLocks noGrp="1"/>
-          </p:cNvSpPr>
-          <p:nvPr>
-            <p:ph idx="1"/>
-          </p:nvPr>
-        </p:nvSpPr>
-        <p:spPr/>
-        <p:txBody>
-          <a:bodyPr/>
-          <a:lstStyle/>
-          <a:p>
-            <a:endParaRPr lang="en-US"/>
-          </a:p>
-        </p:txBody>
-      </p:sp>
-    </p:spTree>
-    <p:extLst>
-      <p:ext uri="{BB962C8B-B14F-4D97-AF65-F5344CB8AC3E}">
-        <p14:creationId xmlns:p14="http://schemas.microsoft.com/office/powerpoint/2010/main" val="3542044573"/>
+        <p14:creationId xmlns:p14="http://schemas.microsoft.com/office/powerpoint/2010/main" val="953460677"/>
       </p:ext>
     </p:extLst>
   </p:cSld>
@@ -3788,7 +3923,7 @@
         </p:spPr>
         <p:txBody>
           <a:bodyPr>
-            <a:normAutofit/>
+            <a:normAutofit fontScale="90000"/>
           </a:bodyPr>
           <a:lstStyle/>
           <a:p>
@@ -3799,6 +3934,13 @@
             <a:r>
               <a:rPr lang="en-US" sz="1800" dirty="0"/>
               <a:t>Locations sampled during each year and sampling replicate. Symbols indicate year.</a:t>
+            </a:r>
+            <a:br>
+              <a:rPr lang="en-US" sz="1800" dirty="0"/>
+            </a:br>
+            <a:r>
+              <a:rPr lang="en-US" sz="1800" dirty="0"/>
+              <a:t>Add scatter plots of temperature, salinity, dissolved oxygen, and chlorophyll vs. depth, colored by seafloor depth</a:t>
             </a:r>
           </a:p>
         </p:txBody>
